--- a/data-eng/decks/w2d1s2.pptx
+++ b/data-eng/decks/w2d1s2.pptx
@@ -5961,7 +5961,7 @@
                 <a:ea typeface="Pretendard"/>
                 <a:cs typeface="Pretendard"/>
               </a:rPr>
-              <a:t>ready for connections</a:t>
+              <a:t>ready … port: 3306</a:t>
             </a:r>
           </a:p>
         </p:txBody>
@@ -6107,7 +6107,7 @@
                 <a:ea typeface="Pretendard"/>
                 <a:cs typeface="Pretendard"/>
               </a:rPr>
-              <a:t>docker exec -it de-mysql mysql</a:t>
+              <a:t>exec -it -e LANG=C.UTF-8</a:t>
             </a:r>
           </a:p>
           <a:p>
@@ -7951,7 +7951,7 @@
                 <a:ea typeface="Pretendard"/>
                 <a:cs typeface="Pretendard"/>
               </a:rPr>
-              <a:t>2단계 — 일부러 실패</a:t>
+              <a:t>2단계 — 준비 확인</a:t>
             </a:r>
           </a:p>
         </p:txBody>
@@ -7992,7 +7992,7 @@
                 <a:ea typeface="Pretendard"/>
                 <a:cs typeface="Pretendard"/>
               </a:rPr>
-              <a:t>뜨자마자 붙어 보기 — Up 이 곧 준비 완료는 아니다</a:t>
+              <a:t>Up 이 곧 준비 완료는 아니다</a:t>
             </a:r>
           </a:p>
         </p:txBody>
@@ -8168,7 +8168,7 @@
                 <a:ea typeface="Pretendard"/>
                 <a:cs typeface="Pretendard"/>
               </a:rPr>
-              <a:t>docker ps 에 Up 이 보이자마자 접속</a:t>
+              <a:t>처음 한 번은 초기화가 더 걸린다</a:t>
             </a:r>
           </a:p>
         </p:txBody>
@@ -8209,7 +8209,7 @@
                 <a:ea typeface="Pretendard"/>
                 <a:cs typeface="Pretendard"/>
               </a:rPr>
-              <a:t>MySQL 은 컨테이너가 뜬 뒤에도 초기화에 10~30초가 더 걸려 「Can't connect」가 날 수 있다</a:t>
+              <a:t>컨테이너가 Up 이 된 뒤에도 10~30초 — 그 사이에 붙으면 실패할 수 있다</a:t>
             </a:r>
           </a:p>
         </p:txBody>
@@ -8396,7 +8396,7 @@
                 <a:ea typeface="Pretendard"/>
                 <a:cs typeface="Pretendard"/>
               </a:rPr>
-              <a:t>「ready for connections」 문구가 보이면 접속 가능 — 보이면 Ctrl+C 로 빠져나온다</a:t>
+              <a:t>끝에 port: 3306 이 붙은 ready 줄이면 접속 가능 — port: 0 은 아직</a:t>
             </a:r>
           </a:p>
         </p:txBody>
@@ -8583,7 +8583,7 @@
                 <a:ea typeface="Pretendard"/>
                 <a:cs typeface="Pretendard"/>
               </a:rPr>
-              <a:t>docker logs de-mysql | tail -n 5</a:t>
+              <a:t>docker logs --tail 5 de-mysql — MySQL 로그는 | tail 로 걸러지지 않는다</a:t>
             </a:r>
           </a:p>
         </p:txBody>
@@ -9131,7 +9131,7 @@
                 <a:ea typeface="Pretendard"/>
                 <a:cs typeface="Pretendard"/>
               </a:rPr>
-              <a:t>docker exec -it de-mysql mysql -uroot -pdataeng123 shop</a:t>
+              <a:t>docker exec -it -e LANG=C.UTF-8 de-mysql mysql -uroot -pdataeng123 shop</a:t>
             </a:r>
           </a:p>
         </p:txBody>
@@ -9378,7 +9378,7 @@
                 <a:ea typeface="Pretendard"/>
                 <a:cs typeface="Pretendard"/>
               </a:rPr>
-              <a:t>SHOW TABLES; → Empty set 이 정상</a:t>
+              <a:t>-e LANG=C.UTF-8 을 빼면 한글이 사라진다</a:t>
             </a:r>
           </a:p>
         </p:txBody>
@@ -9778,7 +9778,7 @@
                 <a:ea typeface="Pretendard"/>
                 <a:cs typeface="Pretendard"/>
               </a:rPr>
-              <a:t>버전 문자열이 나오면 포트가 열린 것</a:t>
+              <a:t>Access denied 면 3306 을 설치된 MySQL 이 잡은 것</a:t>
             </a:r>
           </a:p>
         </p:txBody>
@@ -11496,7 +11496,7 @@
                 <a:ea typeface="Pretendard"/>
                 <a:cs typeface="Pretendard"/>
               </a:rPr>
-              <a:t>Can't connect</a:t>
+              <a:t>한글이 사라지거나 ???</a:t>
             </a:r>
           </a:p>
         </p:txBody>
@@ -11571,7 +11571,7 @@
                 <a:ea typeface="Pretendard"/>
                 <a:cs typeface="Pretendard"/>
               </a:rPr>
-              <a:t>초기화가 아직 안 끝났다</a:t>
+              <a:t>접속 때 LANG 이 없다</a:t>
             </a:r>
           </a:p>
         </p:txBody>
@@ -11646,7 +11646,25 @@
                 <a:ea typeface="Pretendard"/>
                 <a:cs typeface="Pretendard"/>
               </a:rPr>
-              <a:t>로그에서 ready 확인 후 재시도</a:t>
+              <a:t>exec -it -e LANG=C.UTF-8 로</a:t>
+            </a:r>
+          </a:p>
+          <a:p>
+            <a:pPr algn="ctr">
+              <a:lnSpc>
+                <a:spcPct val="115000"/>
+              </a:lnSpc>
+            </a:pPr>
+            <a:r>
+              <a:rPr sz="1875" b="0">
+                <a:solidFill>
+                  <a:srgbClr val="3D3D3D"/>
+                </a:solidFill>
+                <a:latin typeface="Pretendard"/>
+                <a:ea typeface="Pretendard"/>
+                <a:cs typeface="Pretendard"/>
+              </a:rPr>
+              <a:t>다시 접속</a:t>
             </a:r>
           </a:p>
         </p:txBody>
@@ -11721,7 +11739,7 @@
                 <a:ea typeface="Pretendard"/>
                 <a:cs typeface="Pretendard"/>
               </a:rPr>
-              <a:t>프롬프트가 -&gt; 로 바뀜</a:t>
+              <a:t>밖에서만 Access denied</a:t>
             </a:r>
           </a:p>
         </p:txBody>
@@ -11796,7 +11814,25 @@
                 <a:ea typeface="Pretendard"/>
                 <a:cs typeface="Pretendard"/>
               </a:rPr>
-              <a:t>세미콜론(;)을 안 붙였다</a:t>
+              <a:t>설치된 MySQL 이 3306 을</a:t>
+            </a:r>
+          </a:p>
+          <a:p>
+            <a:pPr algn="ctr">
+              <a:lnSpc>
+                <a:spcPct val="115000"/>
+              </a:lnSpc>
+            </a:pPr>
+            <a:r>
+              <a:rPr sz="1875" b="0">
+                <a:solidFill>
+                  <a:srgbClr val="3D3D3D"/>
+                </a:solidFill>
+                <a:latin typeface="Pretendard"/>
+                <a:ea typeface="Pretendard"/>
+                <a:cs typeface="Pretendard"/>
+              </a:rPr>
+              <a:t>먼저 잡고 있다</a:t>
             </a:r>
           </a:p>
         </p:txBody>
@@ -11871,7 +11907,25 @@
                 <a:ea typeface="Pretendard"/>
                 <a:cs typeface="Pretendard"/>
               </a:rPr>
-              <a:t>; 입력 후 Enter</a:t>
+              <a:t>설치된 MySQL 을 멈춘다</a:t>
+            </a:r>
+          </a:p>
+          <a:p>
+            <a:pPr algn="ctr">
+              <a:lnSpc>
+                <a:spcPct val="115000"/>
+              </a:lnSpc>
+            </a:pPr>
+            <a:r>
+              <a:rPr sz="1875" b="0">
+                <a:solidFill>
+                  <a:srgbClr val="3D3D3D"/>
+                </a:solidFill>
+                <a:latin typeface="Pretendard"/>
+                <a:ea typeface="Pretendard"/>
+                <a:cs typeface="Pretendard"/>
+              </a:rPr>
+              <a:t>(실습점검 2단계)</a:t>
             </a:r>
           </a:p>
         </p:txBody>
@@ -12021,7 +12075,7 @@
                 <a:ea typeface="Pretendard"/>
                 <a:cs typeface="Pretendard"/>
               </a:rPr>
-              <a:t>리눅스 도커 엔진 직접 사용</a:t>
+              <a:t>리눅스·WSL2 의 도커 엔진</a:t>
             </a:r>
           </a:p>
         </p:txBody>
@@ -12189,7 +12243,7 @@
                 <a:ea typeface="Pretendard"/>
                 <a:cs typeface="Pretendard"/>
               </a:rPr>
-              <a:t>mysql 클라이언트 없음</a:t>
+              <a:t>초기화 중 접속 실패</a:t>
             </a:r>
           </a:p>
         </p:txBody>
@@ -12264,7 +12318,7 @@
                 <a:ea typeface="Pretendard"/>
                 <a:cs typeface="Pretendard"/>
               </a:rPr>
-              <a:t>내 컴퓨터에 미설치</a:t>
+              <a:t>port: 3306 줄 전에 붙었다</a:t>
             </a:r>
           </a:p>
         </p:txBody>
@@ -12339,7 +12393,7 @@
                 <a:ea typeface="Pretendard"/>
                 <a:cs typeface="Pretendard"/>
               </a:rPr>
-              <a:t>docker run --rm mysql:8.0 으로 대신</a:t>
+              <a:t>로그 확인 후 재시도</a:t>
             </a:r>
           </a:p>
         </p:txBody>
@@ -13004,7 +13058,7 @@
                 <a:ea typeface="Pretendard"/>
                 <a:cs typeface="Pretendard"/>
               </a:rPr>
-              <a:t>docker logs 에 ready for connections</a:t>
+              <a:t>docker logs 에 ready for connections … port: 3306</a:t>
             </a:r>
           </a:p>
         </p:txBody>

--- a/data-eng/decks/w2d1s2.pptx
+++ b/data-eng/decks/w2d1s2.pptx
@@ -4381,7 +4381,7 @@
                 <a:ea typeface="Pretendard"/>
                 <a:cs typeface="Pretendard"/>
               </a:rPr>
-              <a:t>mysql&gt; 프롬프트에 접속된 상태</a:t>
+              <a:t>-e LANG=C.UTF-8 로 mysql&gt; 접속</a:t>
             </a:r>
           </a:p>
         </p:txBody>
@@ -4893,7 +4893,7 @@
                 <a:ea typeface="Pretendard"/>
                 <a:cs typeface="Pretendard"/>
               </a:rPr>
-              <a:t>로그의 ready for connections 로 준비 완료를 판단한다</a:t>
+              <a:t>로그에서 port: 3306 이 붙은 ready 줄로 준비 완료를 판단한다</a:t>
             </a:r>
           </a:p>
         </p:txBody>
@@ -5943,7 +5943,7 @@
                 <a:ea typeface="Pretendard"/>
                 <a:cs typeface="Pretendard"/>
               </a:rPr>
-              <a:t>docker logs -f de-mysql</a:t>
+              <a:t>logs -f de-mysql</a:t>
             </a:r>
           </a:p>
           <a:p>
@@ -6271,7 +6271,7 @@
                 <a:ea typeface="Pretendard"/>
                 <a:cs typeface="Pretendard"/>
               </a:rPr>
-              <a:t>mysql -h 127.0.0.1 -P 3306</a:t>
+              <a:t>mysql -h 127.0.0.1</a:t>
             </a:r>
           </a:p>
           <a:p>
@@ -8396,7 +8396,7 @@
                 <a:ea typeface="Pretendard"/>
                 <a:cs typeface="Pretendard"/>
               </a:rPr>
-              <a:t>끝에 port: 3306 이 붙은 ready 줄이면 접속 가능 — port: 0 은 아직</a:t>
+              <a:t>ready … port: 3306 줄이면 Ctrl+C — port: 0 · 33060 은 아직</a:t>
             </a:r>
           </a:p>
         </p:txBody>
@@ -9236,7 +9236,7 @@
                 <a:ea typeface="Pretendard"/>
                 <a:cs typeface="Pretendard"/>
               </a:rPr>
-              <a:t>SELECT VERSION(); → 8.0.x</a:t>
+              <a:t>VERSION() → 8.0.x · DATABASE() → shop</a:t>
             </a:r>
           </a:p>
         </p:txBody>
@@ -9307,7 +9307,7 @@
                 <a:ea typeface="Pretendard"/>
                 <a:cs typeface="Pretendard"/>
               </a:rPr>
-              <a:t>SELECT DATABASE(); → shop</a:t>
+              <a:t>SHOW TABLES → Empty set 이 정상</a:t>
             </a:r>
           </a:p>
         </p:txBody>
@@ -9378,7 +9378,7 @@
                 <a:ea typeface="Pretendard"/>
                 <a:cs typeface="Pretendard"/>
               </a:rPr>
-              <a:t>-e LANG=C.UTF-8 을 빼면 한글이 사라진다</a:t>
+              <a:t>[Warning] Using a password … 는 오류 아님</a:t>
             </a:r>
           </a:p>
         </p:txBody>
@@ -9449,7 +9449,7 @@
                 <a:ea typeface="Pretendard"/>
                 <a:cs typeface="Pretendard"/>
               </a:rPr>
-              <a:t>나가기는 exit 또는 \q</a:t>
+              <a:t>-e LANG=C.UTF-8 을 빼면 한글이 사라진다</a:t>
             </a:r>
           </a:p>
         </p:txBody>
@@ -12434,7 +12434,7 @@
                 <a:ea typeface="Pretendard"/>
                 <a:cs typeface="Pretendard"/>
               </a:rPr>
-              <a:t>SQL 문 끝의 세미콜론(;)을 잊으면 프롬프트가 -&gt; 로 바뀌며 다음 줄을 계속 기다린다</a:t>
+              <a:t>SQL 끝에 세미콜론(;)을 잊으면 프롬프트가 -&gt; 로 바뀐다 — 나가기는 exit 또는 \q</a:t>
             </a:r>
           </a:p>
         </p:txBody>
@@ -13350,7 +13350,7 @@
                 <a:ea typeface="Pretendard"/>
                 <a:cs typeface="Pretendard"/>
               </a:rPr>
-              <a:t>밖에서 mysql -h 127.0.0.1 … 로 버전 문자열이 나온다</a:t>
+              <a:t>밖에서 두 방법 중 하나로 VERSION() 8.0.x 가 나온다</a:t>
             </a:r>
           </a:p>
         </p:txBody>

--- a/data-eng/decks/w2d1s2.pptx
+++ b/data-eng/decks/w2d1s2.pptx
@@ -3099,7 +3099,7 @@
       <p:grpSpPr/>
       <p:sp>
         <p:nvSpPr>
-          <p:cNvPr id="2" name="Oval 1"/>
+          <p:cNvPr id="2" name="deckgen:decor"/>
           <p:cNvSpPr/>
           <p:nvPr/>
         </p:nvSpPr>
@@ -3129,7 +3129,7 @@
       </p:sp>
       <p:sp>
         <p:nvSpPr>
-          <p:cNvPr id="3" name="Oval 2"/>
+          <p:cNvPr id="3" name="deckgen:decor"/>
           <p:cNvSpPr/>
           <p:nvPr/>
         </p:nvSpPr>
@@ -3159,7 +3159,7 @@
       </p:sp>
       <p:sp>
         <p:nvSpPr>
-          <p:cNvPr id="4" name="Oval 3"/>
+          <p:cNvPr id="4" name="deckgen:decor"/>
           <p:cNvSpPr/>
           <p:nvPr/>
         </p:nvSpPr>
@@ -3189,7 +3189,7 @@
       </p:sp>
       <p:sp>
         <p:nvSpPr>
-          <p:cNvPr id="5" name="Rectangle 4"/>
+          <p:cNvPr id="5" name="deckgen:decor"/>
           <p:cNvSpPr/>
           <p:nvPr/>
         </p:nvSpPr>
@@ -3219,7 +3219,7 @@
       </p:sp>
       <p:sp>
         <p:nvSpPr>
-          <p:cNvPr id="6" name="Oval 5"/>
+          <p:cNvPr id="6" name="deckgen:decor"/>
           <p:cNvSpPr/>
           <p:nvPr/>
         </p:nvSpPr>
@@ -3249,7 +3249,7 @@
       </p:sp>
       <p:sp>
         <p:nvSpPr>
-          <p:cNvPr id="7" name="Oval 6"/>
+          <p:cNvPr id="7" name="deckgen:decor"/>
           <p:cNvSpPr/>
           <p:nvPr/>
         </p:nvSpPr>
@@ -3279,7 +3279,7 @@
       </p:sp>
       <p:sp>
         <p:nvSpPr>
-          <p:cNvPr id="8" name="Oval 7"/>
+          <p:cNvPr id="8" name="deckgen:decor"/>
           <p:cNvSpPr/>
           <p:nvPr/>
         </p:nvSpPr>
@@ -3309,7 +3309,7 @@
       </p:sp>
       <p:sp>
         <p:nvSpPr>
-          <p:cNvPr id="9" name="Oval 8"/>
+          <p:cNvPr id="9" name="deckgen:decor"/>
           <p:cNvSpPr/>
           <p:nvPr/>
         </p:nvSpPr>
@@ -3339,7 +3339,7 @@
       </p:sp>
       <p:sp>
         <p:nvSpPr>
-          <p:cNvPr id="10" name="Rectangle 9"/>
+          <p:cNvPr id="10" name="deckgen:decor"/>
           <p:cNvSpPr/>
           <p:nvPr/>
         </p:nvSpPr>
@@ -3433,7 +3433,7 @@
                 <a:ea typeface="Pretendard"/>
                 <a:cs typeface="Pretendard"/>
               </a:rPr>
-              <a:t>2-1 · MySQL 8.0 설치 및 기초 쿼리 · 실습 1H</a:t>
+              <a:t>2-1 · MySQL 9.7 설치 및 기초 쿼리 · 실습 1H</a:t>
             </a:r>
           </a:p>
         </p:txBody>
@@ -3474,7 +3474,7 @@
                 <a:ea typeface="Pretendard"/>
                 <a:cs typeface="Pretendard"/>
               </a:rPr>
-              <a:t>Docker로 MySQL 8.0 기동과 접속</a:t>
+              <a:t>Docker로 MySQL 9.7 기동과 접속</a:t>
             </a:r>
           </a:p>
         </p:txBody>
@@ -3599,7 +3599,7 @@
       <p:grpSpPr/>
       <p:sp>
         <p:nvSpPr>
-          <p:cNvPr id="2" name="Oval 1"/>
+          <p:cNvPr id="2" name="deckgen:decor"/>
           <p:cNvSpPr/>
           <p:nvPr/>
         </p:nvSpPr>
@@ -3629,7 +3629,7 @@
       </p:sp>
       <p:sp>
         <p:nvSpPr>
-          <p:cNvPr id="3" name="Oval 2"/>
+          <p:cNvPr id="3" name="deckgen:decor"/>
           <p:cNvSpPr/>
           <p:nvPr/>
         </p:nvSpPr>
@@ -4406,7 +4406,7 @@
       <p:grpSpPr/>
       <p:sp>
         <p:nvSpPr>
-          <p:cNvPr id="2" name="Oval 1"/>
+          <p:cNvPr id="2" name="deckgen:decor"/>
           <p:cNvSpPr/>
           <p:nvPr/>
         </p:nvSpPr>
@@ -4436,7 +4436,7 @@
       </p:sp>
       <p:sp>
         <p:nvSpPr>
-          <p:cNvPr id="3" name="Oval 2"/>
+          <p:cNvPr id="3" name="deckgen:decor"/>
           <p:cNvSpPr/>
           <p:nvPr/>
         </p:nvSpPr>
@@ -4466,7 +4466,7 @@
       </p:sp>
       <p:sp>
         <p:nvSpPr>
-          <p:cNvPr id="4" name="Oval 3"/>
+          <p:cNvPr id="4" name="deckgen:decor"/>
           <p:cNvSpPr/>
           <p:nvPr/>
         </p:nvSpPr>
@@ -5397,7 +5397,7 @@
       <p:grpSpPr/>
       <p:sp>
         <p:nvSpPr>
-          <p:cNvPr id="2" name="Oval 1"/>
+          <p:cNvPr id="2" name="deckgen:decor"/>
           <p:cNvSpPr/>
           <p:nvPr/>
         </p:nvSpPr>
@@ -5427,7 +5427,7 @@
       </p:sp>
       <p:sp>
         <p:nvSpPr>
-          <p:cNvPr id="3" name="Oval 2"/>
+          <p:cNvPr id="3" name="deckgen:decor"/>
           <p:cNvSpPr/>
           <p:nvPr/>
         </p:nvSpPr>
@@ -5457,7 +5457,7 @@
       </p:sp>
       <p:sp>
         <p:nvSpPr>
-          <p:cNvPr id="4" name="Oval 3"/>
+          <p:cNvPr id="4" name="deckgen:decor"/>
           <p:cNvSpPr/>
           <p:nvPr/>
         </p:nvSpPr>
@@ -5779,7 +5779,7 @@
                 <a:ea typeface="Pretendard"/>
                 <a:cs typeface="Pretendard"/>
               </a:rPr>
-              <a:t>docker run -d … mysql:8.0</a:t>
+              <a:t>docker run -d … mysql:9.7</a:t>
             </a:r>
           </a:p>
           <a:p>
@@ -6590,7 +6590,7 @@
       <p:grpSpPr/>
       <p:sp>
         <p:nvSpPr>
-          <p:cNvPr id="2" name="Oval 1"/>
+          <p:cNvPr id="2" name="deckgen:decor"/>
           <p:cNvSpPr/>
           <p:nvPr/>
         </p:nvSpPr>
@@ -6620,7 +6620,7 @@
       </p:sp>
       <p:sp>
         <p:nvSpPr>
-          <p:cNvPr id="3" name="Oval 2"/>
+          <p:cNvPr id="3" name="deckgen:decor"/>
           <p:cNvSpPr/>
           <p:nvPr/>
         </p:nvSpPr>
@@ -6650,7 +6650,7 @@
       </p:sp>
       <p:sp>
         <p:nvSpPr>
-          <p:cNvPr id="4" name="Oval 3"/>
+          <p:cNvPr id="4" name="deckgen:decor"/>
           <p:cNvSpPr/>
           <p:nvPr/>
         </p:nvSpPr>
@@ -7576,7 +7576,7 @@
                 <a:ea typeface="Pretendard"/>
                 <a:cs typeface="Pretendard"/>
               </a:rPr>
-              <a:t>mysql:8.0</a:t>
+              <a:t>mysql:9.7</a:t>
             </a:r>
           </a:p>
         </p:txBody>
@@ -7827,7 +7827,7 @@
       <p:grpSpPr/>
       <p:sp>
         <p:nvSpPr>
-          <p:cNvPr id="2" name="Oval 1"/>
+          <p:cNvPr id="2" name="deckgen:decor"/>
           <p:cNvSpPr/>
           <p:nvPr/>
         </p:nvSpPr>
@@ -7857,7 +7857,7 @@
       </p:sp>
       <p:sp>
         <p:nvSpPr>
-          <p:cNvPr id="3" name="Oval 2"/>
+          <p:cNvPr id="3" name="deckgen:decor"/>
           <p:cNvSpPr/>
           <p:nvPr/>
         </p:nvSpPr>
@@ -7887,7 +7887,7 @@
       </p:sp>
       <p:sp>
         <p:nvSpPr>
-          <p:cNvPr id="4" name="Oval 3"/>
+          <p:cNvPr id="4" name="deckgen:decor"/>
           <p:cNvSpPr/>
           <p:nvPr/>
         </p:nvSpPr>
@@ -8854,7 +8854,7 @@
       <p:grpSpPr/>
       <p:sp>
         <p:nvSpPr>
-          <p:cNvPr id="2" name="Oval 1"/>
+          <p:cNvPr id="2" name="deckgen:decor"/>
           <p:cNvSpPr/>
           <p:nvPr/>
         </p:nvSpPr>
@@ -8884,7 +8884,7 @@
       </p:sp>
       <p:sp>
         <p:nvSpPr>
-          <p:cNvPr id="3" name="Oval 2"/>
+          <p:cNvPr id="3" name="deckgen:decor"/>
           <p:cNvSpPr/>
           <p:nvPr/>
         </p:nvSpPr>
@@ -8914,7 +8914,7 @@
       </p:sp>
       <p:sp>
         <p:nvSpPr>
-          <p:cNvPr id="4" name="Oval 3"/>
+          <p:cNvPr id="4" name="deckgen:decor"/>
           <p:cNvSpPr/>
           <p:nvPr/>
         </p:nvSpPr>
@@ -9236,7 +9236,7 @@
                 <a:ea typeface="Pretendard"/>
                 <a:cs typeface="Pretendard"/>
               </a:rPr>
-              <a:t>VERSION() → 8.0.x · DATABASE() → shop</a:t>
+              <a:t>VERSION() → 9.7.x · DATABASE() → shop</a:t>
             </a:r>
           </a:p>
         </p:txBody>
@@ -9707,7 +9707,7 @@
                 <a:ea typeface="Pretendard"/>
                 <a:cs typeface="Pretendard"/>
               </a:rPr>
-              <a:t>없으면 mysql:8.0 컨테이너를 클라이언트로 (-h host.docker.internal)</a:t>
+              <a:t>없으면 mysql:9.7 컨테이너를 클라이언트로 (-h host.docker.internal)</a:t>
             </a:r>
           </a:p>
         </p:txBody>
@@ -9986,7 +9986,7 @@
       <p:grpSpPr/>
       <p:sp>
         <p:nvSpPr>
-          <p:cNvPr id="2" name="Oval 1"/>
+          <p:cNvPr id="2" name="deckgen:decor"/>
           <p:cNvSpPr/>
           <p:nvPr/>
         </p:nvSpPr>
@@ -10016,7 +10016,7 @@
       </p:sp>
       <p:sp>
         <p:nvSpPr>
-          <p:cNvPr id="3" name="Oval 2"/>
+          <p:cNvPr id="3" name="deckgen:decor"/>
           <p:cNvSpPr/>
           <p:nvPr/>
         </p:nvSpPr>
@@ -10046,7 +10046,7 @@
       </p:sp>
       <p:sp>
         <p:nvSpPr>
-          <p:cNvPr id="4" name="Oval 3"/>
+          <p:cNvPr id="4" name="deckgen:decor"/>
           <p:cNvSpPr/>
           <p:nvPr/>
         </p:nvSpPr>
@@ -11013,7 +11013,7 @@
       <p:grpSpPr/>
       <p:sp>
         <p:nvSpPr>
-          <p:cNvPr id="2" name="Oval 1"/>
+          <p:cNvPr id="2" name="deckgen:decor"/>
           <p:cNvSpPr/>
           <p:nvPr/>
         </p:nvSpPr>
@@ -11043,7 +11043,7 @@
       </p:sp>
       <p:sp>
         <p:nvSpPr>
-          <p:cNvPr id="3" name="Oval 2"/>
+          <p:cNvPr id="3" name="deckgen:decor"/>
           <p:cNvSpPr/>
           <p:nvPr/>
         </p:nvSpPr>
@@ -11073,7 +11073,7 @@
       </p:sp>
       <p:sp>
         <p:nvSpPr>
-          <p:cNvPr id="4" name="Oval 3"/>
+          <p:cNvPr id="4" name="deckgen:decor"/>
           <p:cNvSpPr/>
           <p:nvPr/>
         </p:nvSpPr>
@@ -12571,7 +12571,7 @@
       <p:grpSpPr/>
       <p:sp>
         <p:nvSpPr>
-          <p:cNvPr id="2" name="Oval 1"/>
+          <p:cNvPr id="2" name="deckgen:decor"/>
           <p:cNvSpPr/>
           <p:nvPr/>
         </p:nvSpPr>
@@ -12601,7 +12601,7 @@
       </p:sp>
       <p:sp>
         <p:nvSpPr>
-          <p:cNvPr id="3" name="Oval 2"/>
+          <p:cNvPr id="3" name="deckgen:decor"/>
           <p:cNvSpPr/>
           <p:nvPr/>
         </p:nvSpPr>
@@ -12631,7 +12631,7 @@
       </p:sp>
       <p:sp>
         <p:nvSpPr>
-          <p:cNvPr id="4" name="Oval 3"/>
+          <p:cNvPr id="4" name="deckgen:decor"/>
           <p:cNvSpPr/>
           <p:nvPr/>
         </p:nvSpPr>
@@ -13204,7 +13204,7 @@
                 <a:ea typeface="Pretendard"/>
                 <a:cs typeface="Pretendard"/>
               </a:rPr>
-              <a:t>mysql&gt; 프롬프트에서 VERSION() 이 8.0.x, DATABASE() 가 shop</a:t>
+              <a:t>mysql&gt; 프롬프트에서 VERSION() 이 9.7.x, DATABASE() 가 shop</a:t>
             </a:r>
           </a:p>
         </p:txBody>
@@ -13350,7 +13350,7 @@
                 <a:ea typeface="Pretendard"/>
                 <a:cs typeface="Pretendard"/>
               </a:rPr>
-              <a:t>밖에서 두 방법 중 하나로 VERSION() 8.0.x 가 나온다</a:t>
+              <a:t>밖에서 두 방법 중 하나로 VERSION() 9.7.x 가 나온다</a:t>
             </a:r>
           </a:p>
         </p:txBody>
